--- a/Pre_arquivos/SprintReview_1_CeresDiagnostico.pptx
+++ b/Pre_arquivos/SprintReview_1_CeresDiagnostico.pptx
@@ -312,7 +312,7 @@
           <a:p>
             <a:fld id="{5BCAD085-E8A6-8845-BD4E-CB4CCA059FC4}" type="datetimeFigureOut">
               <a:rPr lang="en-US" smtClean="0"/>
-              <a:t>4/12/2026</a:t>
+              <a:t>4/13/2026</a:t>
             </a:fld>
             <a:endParaRPr lang="en-US"/>
           </a:p>
@@ -480,7 +480,7 @@
           <a:p>
             <a:fld id="{5BCAD085-E8A6-8845-BD4E-CB4CCA059FC4}" type="datetimeFigureOut">
               <a:rPr lang="en-US" smtClean="0"/>
-              <a:t>4/12/2026</a:t>
+              <a:t>4/13/2026</a:t>
             </a:fld>
             <a:endParaRPr lang="en-US"/>
           </a:p>
@@ -658,7 +658,7 @@
           <a:p>
             <a:fld id="{5BCAD085-E8A6-8845-BD4E-CB4CCA059FC4}" type="datetimeFigureOut">
               <a:rPr lang="en-US" smtClean="0"/>
-              <a:t>4/12/2026</a:t>
+              <a:t>4/13/2026</a:t>
             </a:fld>
             <a:endParaRPr lang="en-US"/>
           </a:p>
@@ -826,7 +826,7 @@
           <a:p>
             <a:fld id="{5BCAD085-E8A6-8845-BD4E-CB4CCA059FC4}" type="datetimeFigureOut">
               <a:rPr lang="en-US" smtClean="0"/>
-              <a:t>4/12/2026</a:t>
+              <a:t>4/13/2026</a:t>
             </a:fld>
             <a:endParaRPr lang="en-US"/>
           </a:p>
@@ -1071,7 +1071,7 @@
           <a:p>
             <a:fld id="{5BCAD085-E8A6-8845-BD4E-CB4CCA059FC4}" type="datetimeFigureOut">
               <a:rPr lang="en-US" smtClean="0"/>
-              <a:t>4/12/2026</a:t>
+              <a:t>4/13/2026</a:t>
             </a:fld>
             <a:endParaRPr lang="en-US"/>
           </a:p>
@@ -1356,7 +1356,7 @@
           <a:p>
             <a:fld id="{5BCAD085-E8A6-8845-BD4E-CB4CCA059FC4}" type="datetimeFigureOut">
               <a:rPr lang="en-US" smtClean="0"/>
-              <a:t>4/12/2026</a:t>
+              <a:t>4/13/2026</a:t>
             </a:fld>
             <a:endParaRPr lang="en-US"/>
           </a:p>
@@ -1775,7 +1775,7 @@
           <a:p>
             <a:fld id="{5BCAD085-E8A6-8845-BD4E-CB4CCA059FC4}" type="datetimeFigureOut">
               <a:rPr lang="en-US" smtClean="0"/>
-              <a:t>4/12/2026</a:t>
+              <a:t>4/13/2026</a:t>
             </a:fld>
             <a:endParaRPr lang="en-US"/>
           </a:p>
@@ -1892,7 +1892,7 @@
           <a:p>
             <a:fld id="{5BCAD085-E8A6-8845-BD4E-CB4CCA059FC4}" type="datetimeFigureOut">
               <a:rPr lang="en-US" smtClean="0"/>
-              <a:t>4/12/2026</a:t>
+              <a:t>4/13/2026</a:t>
             </a:fld>
             <a:endParaRPr lang="en-US"/>
           </a:p>
@@ -1987,7 +1987,7 @@
           <a:p>
             <a:fld id="{5BCAD085-E8A6-8845-BD4E-CB4CCA059FC4}" type="datetimeFigureOut">
               <a:rPr lang="en-US" smtClean="0"/>
-              <a:t>4/12/2026</a:t>
+              <a:t>4/13/2026</a:t>
             </a:fld>
             <a:endParaRPr lang="en-US"/>
           </a:p>
@@ -2262,7 +2262,7 @@
           <a:p>
             <a:fld id="{5BCAD085-E8A6-8845-BD4E-CB4CCA059FC4}" type="datetimeFigureOut">
               <a:rPr lang="en-US" smtClean="0"/>
-              <a:t>4/12/2026</a:t>
+              <a:t>4/13/2026</a:t>
             </a:fld>
             <a:endParaRPr lang="en-US"/>
           </a:p>
@@ -2514,7 +2514,7 @@
           <a:p>
             <a:fld id="{5BCAD085-E8A6-8845-BD4E-CB4CCA059FC4}" type="datetimeFigureOut">
               <a:rPr lang="en-US" smtClean="0"/>
-              <a:t>4/12/2026</a:t>
+              <a:t>4/13/2026</a:t>
             </a:fld>
             <a:endParaRPr lang="en-US"/>
           </a:p>
@@ -2725,7 +2725,7 @@
           <a:p>
             <a:fld id="{5BCAD085-E8A6-8845-BD4E-CB4CCA059FC4}" type="datetimeFigureOut">
               <a:rPr lang="en-US" smtClean="0"/>
-              <a:t>4/12/2026</a:t>
+              <a:t>4/13/2026</a:t>
             </a:fld>
             <a:endParaRPr lang="en-US"/>
           </a:p>
@@ -3384,7 +3384,25 @@
                 </a:solidFill>
                 <a:latin typeface="Calibri"/>
               </a:rPr>
-              <a:t>Eng. </a:t>
+              <a:t>Eng.</a:t>
+            </a:r>
+            <a:r>
+              <a:rPr lang="pt-BR" sz="1400" b="0" i="0" dirty="0">
+                <a:solidFill>
+                  <a:srgbClr val="D4E6C3"/>
+                </a:solidFill>
+                <a:latin typeface="Calibri"/>
+              </a:rPr>
+              <a:t> da</a:t>
+            </a:r>
+            <a:r>
+              <a:rPr sz="1400" b="0" i="0" dirty="0">
+                <a:solidFill>
+                  <a:srgbClr val="D4E6C3"/>
+                </a:solidFill>
+                <a:latin typeface="Calibri"/>
+              </a:rPr>
+              <a:t> </a:t>
             </a:r>
             <a:r>
               <a:rPr sz="1400" b="0" i="0" dirty="0" err="1">
